--- a/hafta4/4.pptx
+++ b/hafta4/4.pptx
@@ -10,6 +10,7 @@
     <p:sldId id="285" r:id="rId4"/>
     <p:sldId id="260" r:id="rId5"/>
     <p:sldId id="261" r:id="rId6"/>
+    <p:sldId id="286" r:id="rId7"/>
   </p:sldIdLst>
   <p:sldSz cx="12192000" cy="6858000"/>
   <p:notesSz cx="6858000" cy="9144000"/>
@@ -127,176 +128,28 @@
 </p:presentation>
 </file>
 
+<file path=ppt/revisionInfo.xml><?xml version="1.0" encoding="utf-8"?>
+<p1510:revInfo xmlns:a="http://schemas.openxmlformats.org/drawingml/2006/main" xmlns:r="http://schemas.openxmlformats.org/officeDocument/2006/relationships" xmlns:p1510="http://schemas.microsoft.com/office/powerpoint/2015/10/main">
+  <p1510:revLst>
+    <p1510:client id="{E43340F3-00B9-494A-833D-82A309359AC7}" v="2" dt="2026-10-21T09:06:04.123"/>
+  </p1510:revLst>
+</p1510:revInfo>
+</file>
+
 <file path=ppt/changesInfos/changesInfo1.xml><?xml version="1.0" encoding="utf-8"?>
 <pc:chgInfo xmlns:a="http://schemas.openxmlformats.org/drawingml/2006/main" xmlns:r="http://schemas.openxmlformats.org/officeDocument/2006/relationships" xmlns:ac="http://schemas.microsoft.com/office/drawing/2013/main/command" xmlns:pc="http://schemas.microsoft.com/office/powerpoint/2013/main/command">
   <pc:docChgLst>
     <pc:chgData name="kahraman kostas" userId="7e50b7f88a301451" providerId="LiveId" clId="{D29DB3F4-6A73-4688-B8FC-B3E2229DDA63}"/>
     <pc:docChg chg="custSel addSld delSld modSld">
-      <pc:chgData name="kahraman kostas" userId="7e50b7f88a301451" providerId="LiveId" clId="{D29DB3F4-6A73-4688-B8FC-B3E2229DDA63}" dt="2026-10-14T09:37:56.782" v="47" actId="14100"/>
+      <pc:chgData name="kahraman kostas" userId="7e50b7f88a301451" providerId="LiveId" clId="{D29DB3F4-6A73-4688-B8FC-B3E2229DDA63}" dt="2026-10-21T09:06:28.854" v="61" actId="1076"/>
       <pc:docMkLst>
         <pc:docMk/>
       </pc:docMkLst>
-      <pc:sldChg chg="del">
-        <pc:chgData name="kahraman kostas" userId="7e50b7f88a301451" providerId="LiveId" clId="{D29DB3F4-6A73-4688-B8FC-B3E2229DDA63}" dt="2026-10-14T09:25:43.773" v="24" actId="47"/>
-        <pc:sldMkLst>
-          <pc:docMk/>
-          <pc:sldMk cId="994391034" sldId="256"/>
-        </pc:sldMkLst>
-      </pc:sldChg>
-      <pc:sldChg chg="del">
-        <pc:chgData name="kahraman kostas" userId="7e50b7f88a301451" providerId="LiveId" clId="{D29DB3F4-6A73-4688-B8FC-B3E2229DDA63}" dt="2026-10-14T09:25:43.773" v="24" actId="47"/>
-        <pc:sldMkLst>
-          <pc:docMk/>
-          <pc:sldMk cId="2545976371" sldId="257"/>
-        </pc:sldMkLst>
-      </pc:sldChg>
-      <pc:sldChg chg="del">
-        <pc:chgData name="kahraman kostas" userId="7e50b7f88a301451" providerId="LiveId" clId="{D29DB3F4-6A73-4688-B8FC-B3E2229DDA63}" dt="2026-10-14T09:25:43.773" v="24" actId="47"/>
-        <pc:sldMkLst>
-          <pc:docMk/>
-          <pc:sldMk cId="1667152826" sldId="258"/>
-        </pc:sldMkLst>
-      </pc:sldChg>
-      <pc:sldChg chg="del">
-        <pc:chgData name="kahraman kostas" userId="7e50b7f88a301451" providerId="LiveId" clId="{D29DB3F4-6A73-4688-B8FC-B3E2229DDA63}" dt="2026-10-14T09:25:43.773" v="24" actId="47"/>
-        <pc:sldMkLst>
-          <pc:docMk/>
-          <pc:sldMk cId="949606584" sldId="259"/>
-        </pc:sldMkLst>
-      </pc:sldChg>
       <pc:sldChg chg="addSp delSp modSp mod">
         <pc:chgData name="kahraman kostas" userId="7e50b7f88a301451" providerId="LiveId" clId="{D29DB3F4-6A73-4688-B8FC-B3E2229DDA63}" dt="2026-10-14T09:33:25.587" v="41" actId="21"/>
         <pc:sldMkLst>
           <pc:docMk/>
           <pc:sldMk cId="4200446661" sldId="261"/>
-        </pc:sldMkLst>
-        <pc:picChg chg="add del mod">
-          <ac:chgData name="kahraman kostas" userId="7e50b7f88a301451" providerId="LiveId" clId="{D29DB3F4-6A73-4688-B8FC-B3E2229DDA63}" dt="2026-10-14T09:26:29.941" v="27" actId="21"/>
-          <ac:picMkLst>
-            <pc:docMk/>
-            <pc:sldMk cId="4200446661" sldId="261"/>
-            <ac:picMk id="5" creationId="{5F696EED-2F2F-6F5A-AEB8-C54AD1759D85}"/>
-          </ac:picMkLst>
-        </pc:picChg>
-        <pc:picChg chg="add del mod">
-          <ac:chgData name="kahraman kostas" userId="7e50b7f88a301451" providerId="LiveId" clId="{D29DB3F4-6A73-4688-B8FC-B3E2229DDA63}" dt="2026-10-14T09:33:25.587" v="41" actId="21"/>
-          <ac:picMkLst>
-            <pc:docMk/>
-            <pc:sldMk cId="4200446661" sldId="261"/>
-            <ac:picMk id="7" creationId="{3A1E290F-EFD8-60BC-57A2-6E0893FF1312}"/>
-          </ac:picMkLst>
-        </pc:picChg>
-      </pc:sldChg>
-      <pc:sldChg chg="del">
-        <pc:chgData name="kahraman kostas" userId="7e50b7f88a301451" providerId="LiveId" clId="{D29DB3F4-6A73-4688-B8FC-B3E2229DDA63}" dt="2026-10-14T09:25:43.773" v="24" actId="47"/>
-        <pc:sldMkLst>
-          <pc:docMk/>
-          <pc:sldMk cId="0" sldId="262"/>
-        </pc:sldMkLst>
-      </pc:sldChg>
-      <pc:sldChg chg="del">
-        <pc:chgData name="kahraman kostas" userId="7e50b7f88a301451" providerId="LiveId" clId="{D29DB3F4-6A73-4688-B8FC-B3E2229DDA63}" dt="2026-10-14T09:25:43.773" v="24" actId="47"/>
-        <pc:sldMkLst>
-          <pc:docMk/>
-          <pc:sldMk cId="0" sldId="263"/>
-        </pc:sldMkLst>
-      </pc:sldChg>
-      <pc:sldChg chg="del">
-        <pc:chgData name="kahraman kostas" userId="7e50b7f88a301451" providerId="LiveId" clId="{D29DB3F4-6A73-4688-B8FC-B3E2229DDA63}" dt="2026-10-14T09:25:43.773" v="24" actId="47"/>
-        <pc:sldMkLst>
-          <pc:docMk/>
-          <pc:sldMk cId="0" sldId="264"/>
-        </pc:sldMkLst>
-      </pc:sldChg>
-      <pc:sldChg chg="del">
-        <pc:chgData name="kahraman kostas" userId="7e50b7f88a301451" providerId="LiveId" clId="{D29DB3F4-6A73-4688-B8FC-B3E2229DDA63}" dt="2026-10-14T09:25:43.773" v="24" actId="47"/>
-        <pc:sldMkLst>
-          <pc:docMk/>
-          <pc:sldMk cId="0" sldId="265"/>
-        </pc:sldMkLst>
-      </pc:sldChg>
-      <pc:sldChg chg="del">
-        <pc:chgData name="kahraman kostas" userId="7e50b7f88a301451" providerId="LiveId" clId="{D29DB3F4-6A73-4688-B8FC-B3E2229DDA63}" dt="2026-10-14T09:25:43.773" v="24" actId="47"/>
-        <pc:sldMkLst>
-          <pc:docMk/>
-          <pc:sldMk cId="0" sldId="266"/>
-        </pc:sldMkLst>
-      </pc:sldChg>
-      <pc:sldChg chg="del">
-        <pc:chgData name="kahraman kostas" userId="7e50b7f88a301451" providerId="LiveId" clId="{D29DB3F4-6A73-4688-B8FC-B3E2229DDA63}" dt="2026-10-14T09:25:43.773" v="24" actId="47"/>
-        <pc:sldMkLst>
-          <pc:docMk/>
-          <pc:sldMk cId="0" sldId="267"/>
-        </pc:sldMkLst>
-      </pc:sldChg>
-      <pc:sldChg chg="del">
-        <pc:chgData name="kahraman kostas" userId="7e50b7f88a301451" providerId="LiveId" clId="{D29DB3F4-6A73-4688-B8FC-B3E2229DDA63}" dt="2026-10-14T09:25:43.773" v="24" actId="47"/>
-        <pc:sldMkLst>
-          <pc:docMk/>
-          <pc:sldMk cId="0" sldId="268"/>
-        </pc:sldMkLst>
-      </pc:sldChg>
-      <pc:sldChg chg="del">
-        <pc:chgData name="kahraman kostas" userId="7e50b7f88a301451" providerId="LiveId" clId="{D29DB3F4-6A73-4688-B8FC-B3E2229DDA63}" dt="2026-10-14T09:25:43.773" v="24" actId="47"/>
-        <pc:sldMkLst>
-          <pc:docMk/>
-          <pc:sldMk cId="0" sldId="270"/>
-        </pc:sldMkLst>
-      </pc:sldChg>
-      <pc:sldChg chg="del">
-        <pc:chgData name="kahraman kostas" userId="7e50b7f88a301451" providerId="LiveId" clId="{D29DB3F4-6A73-4688-B8FC-B3E2229DDA63}" dt="2026-10-14T09:25:43.773" v="24" actId="47"/>
-        <pc:sldMkLst>
-          <pc:docMk/>
-          <pc:sldMk cId="0" sldId="271"/>
-        </pc:sldMkLst>
-      </pc:sldChg>
-      <pc:sldChg chg="del">
-        <pc:chgData name="kahraman kostas" userId="7e50b7f88a301451" providerId="LiveId" clId="{D29DB3F4-6A73-4688-B8FC-B3E2229DDA63}" dt="2026-10-14T09:25:43.773" v="24" actId="47"/>
-        <pc:sldMkLst>
-          <pc:docMk/>
-          <pc:sldMk cId="0" sldId="272"/>
-        </pc:sldMkLst>
-      </pc:sldChg>
-      <pc:sldChg chg="del">
-        <pc:chgData name="kahraman kostas" userId="7e50b7f88a301451" providerId="LiveId" clId="{D29DB3F4-6A73-4688-B8FC-B3E2229DDA63}" dt="2026-10-14T09:25:43.773" v="24" actId="47"/>
-        <pc:sldMkLst>
-          <pc:docMk/>
-          <pc:sldMk cId="0" sldId="273"/>
-        </pc:sldMkLst>
-      </pc:sldChg>
-      <pc:sldChg chg="del">
-        <pc:chgData name="kahraman kostas" userId="7e50b7f88a301451" providerId="LiveId" clId="{D29DB3F4-6A73-4688-B8FC-B3E2229DDA63}" dt="2026-10-14T09:25:43.773" v="24" actId="47"/>
-        <pc:sldMkLst>
-          <pc:docMk/>
-          <pc:sldMk cId="0" sldId="274"/>
-        </pc:sldMkLst>
-      </pc:sldChg>
-      <pc:sldChg chg="del">
-        <pc:chgData name="kahraman kostas" userId="7e50b7f88a301451" providerId="LiveId" clId="{D29DB3F4-6A73-4688-B8FC-B3E2229DDA63}" dt="2026-10-14T09:25:43.773" v="24" actId="47"/>
-        <pc:sldMkLst>
-          <pc:docMk/>
-          <pc:sldMk cId="0" sldId="275"/>
-        </pc:sldMkLst>
-      </pc:sldChg>
-      <pc:sldChg chg="del">
-        <pc:chgData name="kahraman kostas" userId="7e50b7f88a301451" providerId="LiveId" clId="{D29DB3F4-6A73-4688-B8FC-B3E2229DDA63}" dt="2026-10-14T09:25:43.773" v="24" actId="47"/>
-        <pc:sldMkLst>
-          <pc:docMk/>
-          <pc:sldMk cId="0" sldId="276"/>
-        </pc:sldMkLst>
-      </pc:sldChg>
-      <pc:sldChg chg="del">
-        <pc:chgData name="kahraman kostas" userId="7e50b7f88a301451" providerId="LiveId" clId="{D29DB3F4-6A73-4688-B8FC-B3E2229DDA63}" dt="2026-10-14T09:25:43.773" v="24" actId="47"/>
-        <pc:sldMkLst>
-          <pc:docMk/>
-          <pc:sldMk cId="0" sldId="277"/>
-        </pc:sldMkLst>
-      </pc:sldChg>
-      <pc:sldChg chg="del">
-        <pc:chgData name="kahraman kostas" userId="7e50b7f88a301451" providerId="LiveId" clId="{D29DB3F4-6A73-4688-B8FC-B3E2229DDA63}" dt="2026-10-14T09:25:43.773" v="24" actId="47"/>
-        <pc:sldMkLst>
-          <pc:docMk/>
-          <pc:sldMk cId="0" sldId="278"/>
         </pc:sldMkLst>
       </pc:sldChg>
       <pc:sldChg chg="addSp delSp modSp mod">
@@ -313,30 +166,6 @@
             <ac:spMk id="2" creationId="{9BB0BB0C-6909-EC5F-13EF-F5AF60479C25}"/>
           </ac:spMkLst>
         </pc:spChg>
-        <pc:spChg chg="del">
-          <ac:chgData name="kahraman kostas" userId="7e50b7f88a301451" providerId="LiveId" clId="{D29DB3F4-6A73-4688-B8FC-B3E2229DDA63}" dt="2026-10-14T09:21:22.980" v="1" actId="478"/>
-          <ac:spMkLst>
-            <pc:docMk/>
-            <pc:sldMk cId="1593203658" sldId="279"/>
-            <ac:spMk id="9" creationId="{919AA1B3-607D-7F39-F75E-26BF9C953F14}"/>
-          </ac:spMkLst>
-        </pc:spChg>
-        <pc:spChg chg="del">
-          <ac:chgData name="kahraman kostas" userId="7e50b7f88a301451" providerId="LiveId" clId="{D29DB3F4-6A73-4688-B8FC-B3E2229DDA63}" dt="2026-10-14T09:21:26.682" v="2" actId="478"/>
-          <ac:spMkLst>
-            <pc:docMk/>
-            <pc:sldMk cId="1593203658" sldId="279"/>
-            <ac:spMk id="11" creationId="{F9043825-CE58-14CB-AB6D-641B00073EE5}"/>
-          </ac:spMkLst>
-        </pc:spChg>
-        <pc:spChg chg="del">
-          <ac:chgData name="kahraman kostas" userId="7e50b7f88a301451" providerId="LiveId" clId="{D29DB3F4-6A73-4688-B8FC-B3E2229DDA63}" dt="2026-10-14T09:21:31.123" v="4" actId="478"/>
-          <ac:spMkLst>
-            <pc:docMk/>
-            <pc:sldMk cId="1593203658" sldId="279"/>
-            <ac:spMk id="15" creationId="{012228FF-0C0D-ACA1-2848-883BE9587FC8}"/>
-          </ac:spMkLst>
-        </pc:spChg>
         <pc:spChg chg="mod">
           <ac:chgData name="kahraman kostas" userId="7e50b7f88a301451" providerId="LiveId" clId="{D29DB3F4-6A73-4688-B8FC-B3E2229DDA63}" dt="2026-10-14T09:26:52.211" v="35" actId="1076"/>
           <ac:spMkLst>
@@ -345,58 +174,6 @@
             <ac:spMk id="16" creationId="{C2B862D8-3F14-5C5A-93E2-BE61B5E02F03}"/>
           </ac:spMkLst>
         </pc:spChg>
-        <pc:spChg chg="del">
-          <ac:chgData name="kahraman kostas" userId="7e50b7f88a301451" providerId="LiveId" clId="{D29DB3F4-6A73-4688-B8FC-B3E2229DDA63}" dt="2026-10-14T09:21:29.440" v="3" actId="478"/>
-          <ac:spMkLst>
-            <pc:docMk/>
-            <pc:sldMk cId="1593203658" sldId="279"/>
-            <ac:spMk id="19" creationId="{8ED10FE9-6DB9-4666-C552-3FE3692FEAD7}"/>
-          </ac:spMkLst>
-        </pc:spChg>
-        <pc:picChg chg="add del mod">
-          <ac:chgData name="kahraman kostas" userId="7e50b7f88a301451" providerId="LiveId" clId="{D29DB3F4-6A73-4688-B8FC-B3E2229DDA63}" dt="2026-10-14T09:22:30.175" v="11" actId="21"/>
-          <ac:picMkLst>
-            <pc:docMk/>
-            <pc:sldMk cId="1593203658" sldId="279"/>
-            <ac:picMk id="4" creationId="{0C7A9ED6-F67D-F9A0-ECA0-D8D17C1E66BF}"/>
-          </ac:picMkLst>
-        </pc:picChg>
-        <pc:picChg chg="del">
-          <ac:chgData name="kahraman kostas" userId="7e50b7f88a301451" providerId="LiveId" clId="{D29DB3F4-6A73-4688-B8FC-B3E2229DDA63}" dt="2026-10-14T09:21:18.479" v="0" actId="478"/>
-          <ac:picMkLst>
-            <pc:docMk/>
-            <pc:sldMk cId="1593203658" sldId="279"/>
-            <ac:picMk id="7" creationId="{79CBD90C-CA5D-4E00-19B6-7DD66430F8C8}"/>
-          </ac:picMkLst>
-        </pc:picChg>
-      </pc:sldChg>
-      <pc:sldChg chg="del">
-        <pc:chgData name="kahraman kostas" userId="7e50b7f88a301451" providerId="LiveId" clId="{D29DB3F4-6A73-4688-B8FC-B3E2229DDA63}" dt="2026-10-14T09:25:43.773" v="24" actId="47"/>
-        <pc:sldMkLst>
-          <pc:docMk/>
-          <pc:sldMk cId="2152405205" sldId="280"/>
-        </pc:sldMkLst>
-      </pc:sldChg>
-      <pc:sldChg chg="del">
-        <pc:chgData name="kahraman kostas" userId="7e50b7f88a301451" providerId="LiveId" clId="{D29DB3F4-6A73-4688-B8FC-B3E2229DDA63}" dt="2026-10-14T09:25:43.773" v="24" actId="47"/>
-        <pc:sldMkLst>
-          <pc:docMk/>
-          <pc:sldMk cId="2257560306" sldId="281"/>
-        </pc:sldMkLst>
-      </pc:sldChg>
-      <pc:sldChg chg="del">
-        <pc:chgData name="kahraman kostas" userId="7e50b7f88a301451" providerId="LiveId" clId="{D29DB3F4-6A73-4688-B8FC-B3E2229DDA63}" dt="2026-10-14T09:25:43.773" v="24" actId="47"/>
-        <pc:sldMkLst>
-          <pc:docMk/>
-          <pc:sldMk cId="1491509956" sldId="282"/>
-        </pc:sldMkLst>
-      </pc:sldChg>
-      <pc:sldChg chg="del">
-        <pc:chgData name="kahraman kostas" userId="7e50b7f88a301451" providerId="LiveId" clId="{D29DB3F4-6A73-4688-B8FC-B3E2229DDA63}" dt="2026-10-14T09:25:43.773" v="24" actId="47"/>
-        <pc:sldMkLst>
-          <pc:docMk/>
-          <pc:sldMk cId="1056806197" sldId="283"/>
-        </pc:sldMkLst>
       </pc:sldChg>
       <pc:sldChg chg="addSp delSp modSp new mod">
         <pc:chgData name="kahraman kostas" userId="7e50b7f88a301451" providerId="LiveId" clId="{D29DB3F4-6A73-4688-B8FC-B3E2229DDA63}" dt="2026-10-14T09:37:56.782" v="47" actId="14100"/>
@@ -404,22 +181,6 @@
           <pc:docMk/>
           <pc:sldMk cId="2318288103" sldId="284"/>
         </pc:sldMkLst>
-        <pc:spChg chg="del">
-          <ac:chgData name="kahraman kostas" userId="7e50b7f88a301451" providerId="LiveId" clId="{D29DB3F4-6A73-4688-B8FC-B3E2229DDA63}" dt="2026-10-14T09:22:37.941" v="14" actId="478"/>
-          <ac:spMkLst>
-            <pc:docMk/>
-            <pc:sldMk cId="2318288103" sldId="284"/>
-            <ac:spMk id="2" creationId="{F2C0AFDF-61B5-BDF6-23D5-BDC8C01581B1}"/>
-          </ac:spMkLst>
-        </pc:spChg>
-        <pc:spChg chg="del">
-          <ac:chgData name="kahraman kostas" userId="7e50b7f88a301451" providerId="LiveId" clId="{D29DB3F4-6A73-4688-B8FC-B3E2229DDA63}" dt="2026-10-14T09:22:36.887" v="13" actId="478"/>
-          <ac:spMkLst>
-            <pc:docMk/>
-            <pc:sldMk cId="2318288103" sldId="284"/>
-            <ac:spMk id="3" creationId="{5A9105CB-4C25-08B2-1900-C0F250AAF8F6}"/>
-          </ac:spMkLst>
-        </pc:spChg>
         <pc:picChg chg="add mod">
           <ac:chgData name="kahraman kostas" userId="7e50b7f88a301451" providerId="LiveId" clId="{D29DB3F4-6A73-4688-B8FC-B3E2229DDA63}" dt="2026-10-14T09:37:49.538" v="45" actId="14100"/>
           <ac:picMkLst>
@@ -451,28 +212,43 @@
           <pc:docMk/>
           <pc:sldMk cId="3312563107" sldId="285"/>
         </pc:sldMkLst>
-        <pc:spChg chg="del">
-          <ac:chgData name="kahraman kostas" userId="7e50b7f88a301451" providerId="LiveId" clId="{D29DB3F4-6A73-4688-B8FC-B3E2229DDA63}" dt="2026-10-14T09:27:00.872" v="38" actId="478"/>
-          <ac:spMkLst>
-            <pc:docMk/>
-            <pc:sldMk cId="3312563107" sldId="285"/>
-            <ac:spMk id="2" creationId="{815E268D-0EB5-E2AE-3A99-FEEAC1D64A67}"/>
-          </ac:spMkLst>
-        </pc:spChg>
-        <pc:spChg chg="del">
-          <ac:chgData name="kahraman kostas" userId="7e50b7f88a301451" providerId="LiveId" clId="{D29DB3F4-6A73-4688-B8FC-B3E2229DDA63}" dt="2026-10-14T09:26:59.206" v="37" actId="478"/>
-          <ac:spMkLst>
-            <pc:docMk/>
-            <pc:sldMk cId="3312563107" sldId="285"/>
-            <ac:spMk id="3" creationId="{0F8475CE-291A-C141-1ABC-80275D022E27}"/>
-          </ac:spMkLst>
-        </pc:spChg>
         <pc:picChg chg="add mod">
           <ac:chgData name="kahraman kostas" userId="7e50b7f88a301451" providerId="LiveId" clId="{D29DB3F4-6A73-4688-B8FC-B3E2229DDA63}" dt="2026-10-14T09:33:31.580" v="44" actId="14100"/>
           <ac:picMkLst>
             <pc:docMk/>
             <pc:sldMk cId="3312563107" sldId="285"/>
             <ac:picMk id="5" creationId="{6D02BC84-73A8-0BFE-D174-5C17634C53D4}"/>
+          </ac:picMkLst>
+        </pc:picChg>
+      </pc:sldChg>
+      <pc:sldChg chg="addSp delSp modSp new mod setBg">
+        <pc:chgData name="kahraman kostas" userId="7e50b7f88a301451" providerId="LiveId" clId="{D29DB3F4-6A73-4688-B8FC-B3E2229DDA63}" dt="2026-10-21T09:06:28.854" v="61" actId="1076"/>
+        <pc:sldMkLst>
+          <pc:docMk/>
+          <pc:sldMk cId="1586123541" sldId="286"/>
+        </pc:sldMkLst>
+        <pc:spChg chg="del">
+          <ac:chgData name="kahraman kostas" userId="7e50b7f88a301451" providerId="LiveId" clId="{D29DB3F4-6A73-4688-B8FC-B3E2229DDA63}" dt="2026-10-21T09:05:51.489" v="54" actId="478"/>
+          <ac:spMkLst>
+            <pc:docMk/>
+            <pc:sldMk cId="1586123541" sldId="286"/>
+            <ac:spMk id="2" creationId="{CBD09C82-EFDA-28D9-7D6C-6AD7285B3922}"/>
+          </ac:spMkLst>
+        </pc:spChg>
+        <pc:spChg chg="del">
+          <ac:chgData name="kahraman kostas" userId="7e50b7f88a301451" providerId="LiveId" clId="{D29DB3F4-6A73-4688-B8FC-B3E2229DDA63}" dt="2026-10-21T09:05:41.869" v="50"/>
+          <ac:spMkLst>
+            <pc:docMk/>
+            <pc:sldMk cId="1586123541" sldId="286"/>
+            <ac:spMk id="3" creationId="{1CE0E2F7-B88B-0D0B-8E80-A39CFA01AFD5}"/>
+          </ac:spMkLst>
+        </pc:spChg>
+        <pc:picChg chg="add mod ord">
+          <ac:chgData name="kahraman kostas" userId="7e50b7f88a301451" providerId="LiveId" clId="{D29DB3F4-6A73-4688-B8FC-B3E2229DDA63}" dt="2026-10-21T09:06:28.854" v="61" actId="1076"/>
+          <ac:picMkLst>
+            <pc:docMk/>
+            <pc:sldMk cId="1586123541" sldId="286"/>
+            <ac:picMk id="5" creationId="{1A48267C-FC94-632F-5F9A-E2C3B1927899}"/>
           </ac:picMkLst>
         </pc:picChg>
       </pc:sldChg>
@@ -630,7 +406,7 @@
           <a:p>
             <a:fld id="{78F08B66-B298-4032-9207-5CCDB4119627}" type="datetimeFigureOut">
               <a:rPr lang="tr-TR" smtClean="0"/>
-              <a:t>14.10.2026</a:t>
+              <a:t>21.10.2026</a:t>
             </a:fld>
             <a:endParaRPr lang="tr-TR"/>
           </a:p>
@@ -830,7 +606,7 @@
           <a:p>
             <a:fld id="{78F08B66-B298-4032-9207-5CCDB4119627}" type="datetimeFigureOut">
               <a:rPr lang="tr-TR" smtClean="0"/>
-              <a:t>14.10.2026</a:t>
+              <a:t>21.10.2026</a:t>
             </a:fld>
             <a:endParaRPr lang="tr-TR"/>
           </a:p>
@@ -1040,7 +816,7 @@
           <a:p>
             <a:fld id="{78F08B66-B298-4032-9207-5CCDB4119627}" type="datetimeFigureOut">
               <a:rPr lang="tr-TR" smtClean="0"/>
-              <a:t>14.10.2026</a:t>
+              <a:t>21.10.2026</a:t>
             </a:fld>
             <a:endParaRPr lang="tr-TR"/>
           </a:p>
@@ -1240,7 +1016,7 @@
           <a:p>
             <a:fld id="{78F08B66-B298-4032-9207-5CCDB4119627}" type="datetimeFigureOut">
               <a:rPr lang="tr-TR" smtClean="0"/>
-              <a:t>14.10.2026</a:t>
+              <a:t>21.10.2026</a:t>
             </a:fld>
             <a:endParaRPr lang="tr-TR"/>
           </a:p>
@@ -1516,7 +1292,7 @@
           <a:p>
             <a:fld id="{78F08B66-B298-4032-9207-5CCDB4119627}" type="datetimeFigureOut">
               <a:rPr lang="tr-TR" smtClean="0"/>
-              <a:t>14.10.2026</a:t>
+              <a:t>21.10.2026</a:t>
             </a:fld>
             <a:endParaRPr lang="tr-TR"/>
           </a:p>
@@ -1784,7 +1560,7 @@
           <a:p>
             <a:fld id="{78F08B66-B298-4032-9207-5CCDB4119627}" type="datetimeFigureOut">
               <a:rPr lang="tr-TR" smtClean="0"/>
-              <a:t>14.10.2026</a:t>
+              <a:t>21.10.2026</a:t>
             </a:fld>
             <a:endParaRPr lang="tr-TR"/>
           </a:p>
@@ -2199,7 +1975,7 @@
           <a:p>
             <a:fld id="{78F08B66-B298-4032-9207-5CCDB4119627}" type="datetimeFigureOut">
               <a:rPr lang="tr-TR" smtClean="0"/>
-              <a:t>14.10.2026</a:t>
+              <a:t>21.10.2026</a:t>
             </a:fld>
             <a:endParaRPr lang="tr-TR"/>
           </a:p>
@@ -2341,7 +2117,7 @@
           <a:p>
             <a:fld id="{78F08B66-B298-4032-9207-5CCDB4119627}" type="datetimeFigureOut">
               <a:rPr lang="tr-TR" smtClean="0"/>
-              <a:t>14.10.2026</a:t>
+              <a:t>21.10.2026</a:t>
             </a:fld>
             <a:endParaRPr lang="tr-TR"/>
           </a:p>
@@ -2454,7 +2230,7 @@
           <a:p>
             <a:fld id="{78F08B66-B298-4032-9207-5CCDB4119627}" type="datetimeFigureOut">
               <a:rPr lang="tr-TR" smtClean="0"/>
-              <a:t>14.10.2026</a:t>
+              <a:t>21.10.2026</a:t>
             </a:fld>
             <a:endParaRPr lang="tr-TR"/>
           </a:p>
@@ -2767,7 +2543,7 @@
           <a:p>
             <a:fld id="{78F08B66-B298-4032-9207-5CCDB4119627}" type="datetimeFigureOut">
               <a:rPr lang="tr-TR" smtClean="0"/>
-              <a:t>14.10.2026</a:t>
+              <a:t>21.10.2026</a:t>
             </a:fld>
             <a:endParaRPr lang="tr-TR"/>
           </a:p>
@@ -3056,7 +2832,7 @@
           <a:p>
             <a:fld id="{78F08B66-B298-4032-9207-5CCDB4119627}" type="datetimeFigureOut">
               <a:rPr lang="tr-TR" smtClean="0"/>
-              <a:t>14.10.2026</a:t>
+              <a:t>21.10.2026</a:t>
             </a:fld>
             <a:endParaRPr lang="tr-TR"/>
           </a:p>
@@ -3299,7 +3075,7 @@
           <a:p>
             <a:fld id="{78F08B66-B298-4032-9207-5CCDB4119627}" type="datetimeFigureOut">
               <a:rPr lang="tr-TR" smtClean="0"/>
-              <a:t>14.10.2026</a:t>
+              <a:t>21.10.2026</a:t>
             </a:fld>
             <a:endParaRPr lang="tr-TR"/>
           </a:p>
@@ -15127,6 +14903,85 @@
 </p:sld>
 </file>
 
+<file path=ppt/slides/slide6.xml><?xml version="1.0" encoding="utf-8"?>
+<p:sld xmlns:a="http://schemas.openxmlformats.org/drawingml/2006/main" xmlns:r="http://schemas.openxmlformats.org/officeDocument/2006/relationships" xmlns:p="http://schemas.openxmlformats.org/presentationml/2006/main">
+  <p:cSld>
+    <p:bg>
+      <p:bgPr>
+        <a:solidFill>
+          <a:schemeClr val="tx1">
+            <a:lumMod val="95000"/>
+            <a:lumOff val="5000"/>
+          </a:schemeClr>
+        </a:solidFill>
+        <a:effectLst/>
+      </p:bgPr>
+    </p:bg>
+    <p:spTree>
+      <p:nvGrpSpPr>
+        <p:cNvPr id="1" name=""/>
+        <p:cNvGrpSpPr/>
+        <p:nvPr/>
+      </p:nvGrpSpPr>
+      <p:grpSpPr>
+        <a:xfrm>
+          <a:off x="0" y="0"/>
+          <a:ext cx="0" cy="0"/>
+          <a:chOff x="0" y="0"/>
+          <a:chExt cx="0" cy="0"/>
+        </a:xfrm>
+      </p:grpSpPr>
+      <p:pic>
+        <p:nvPicPr>
+          <p:cNvPr id="5" name="Content Placeholder 4">
+            <a:extLst>
+              <a:ext uri="{FF2B5EF4-FFF2-40B4-BE49-F238E27FC236}">
+                <a16:creationId xmlns:a16="http://schemas.microsoft.com/office/drawing/2014/main" id="{1A48267C-FC94-632F-5F9A-E2C3B1927899}"/>
+              </a:ext>
+            </a:extLst>
+          </p:cNvPr>
+          <p:cNvPicPr>
+            <a:picLocks noGrp="1" noChangeAspect="1"/>
+          </p:cNvPicPr>
+          <p:nvPr>
+            <p:ph idx="1"/>
+          </p:nvPr>
+        </p:nvPicPr>
+        <p:blipFill>
+          <a:blip r:embed="rId2">
+            <a:extLst>
+              <a:ext uri="{28A0092B-C50C-407E-A947-70E740481C1C}">
+                <a14:useLocalDpi xmlns:a14="http://schemas.microsoft.com/office/drawing/2010/main" val="0"/>
+              </a:ext>
+            </a:extLst>
+          </a:blip>
+          <a:stretch>
+            <a:fillRect/>
+          </a:stretch>
+        </p:blipFill>
+        <p:spPr>
+          <a:xfrm>
+            <a:off x="1347020" y="-343564"/>
+            <a:ext cx="9239780" cy="7349048"/>
+          </a:xfrm>
+          <a:prstGeom prst="rect">
+            <a:avLst/>
+          </a:prstGeom>
+        </p:spPr>
+      </p:pic>
+    </p:spTree>
+    <p:extLst>
+      <p:ext uri="{BB962C8B-B14F-4D97-AF65-F5344CB8AC3E}">
+        <p14:creationId xmlns:p14="http://schemas.microsoft.com/office/powerpoint/2010/main" val="1586123541"/>
+      </p:ext>
+    </p:extLst>
+  </p:cSld>
+  <p:clrMapOvr>
+    <a:masterClrMapping/>
+  </p:clrMapOvr>
+</p:sld>
+</file>
+
 <file path=ppt/theme/theme1.xml><?xml version="1.0" encoding="utf-8"?>
 <a:theme xmlns:a="http://schemas.openxmlformats.org/drawingml/2006/main" name="Office Theme">
   <a:themeElements>

--- a/hafta4/4.pptx
+++ b/hafta4/4.pptx
@@ -6,11 +6,12 @@
   </p:sldMasterIdLst>
   <p:sldIdLst>
     <p:sldId id="279" r:id="rId2"/>
-    <p:sldId id="284" r:id="rId3"/>
-    <p:sldId id="285" r:id="rId4"/>
-    <p:sldId id="260" r:id="rId5"/>
-    <p:sldId id="261" r:id="rId6"/>
-    <p:sldId id="286" r:id="rId7"/>
+    <p:sldId id="287" r:id="rId3"/>
+    <p:sldId id="284" r:id="rId4"/>
+    <p:sldId id="285" r:id="rId5"/>
+    <p:sldId id="260" r:id="rId6"/>
+    <p:sldId id="261" r:id="rId7"/>
+    <p:sldId id="286" r:id="rId8"/>
   </p:sldIdLst>
   <p:sldSz cx="12192000" cy="6858000"/>
   <p:notesSz cx="6858000" cy="9144000"/>
@@ -141,7 +142,7 @@
   <pc:docChgLst>
     <pc:chgData name="kahraman kostas" userId="7e50b7f88a301451" providerId="LiveId" clId="{D29DB3F4-6A73-4688-B8FC-B3E2229DDA63}"/>
     <pc:docChg chg="custSel addSld delSld modSld">
-      <pc:chgData name="kahraman kostas" userId="7e50b7f88a301451" providerId="LiveId" clId="{D29DB3F4-6A73-4688-B8FC-B3E2229DDA63}" dt="2026-10-21T09:06:28.854" v="61" actId="1076"/>
+      <pc:chgData name="kahraman kostas" userId="7e50b7f88a301451" providerId="LiveId" clId="{D29DB3F4-6A73-4688-B8FC-B3E2229DDA63}" dt="2026-10-21T09:11:27.588" v="66"/>
       <pc:docMkLst>
         <pc:docMk/>
       </pc:docMkLst>
@@ -249,6 +250,37 @@
             <pc:docMk/>
             <pc:sldMk cId="1586123541" sldId="286"/>
             <ac:picMk id="5" creationId="{1A48267C-FC94-632F-5F9A-E2C3B1927899}"/>
+          </ac:picMkLst>
+        </pc:picChg>
+      </pc:sldChg>
+      <pc:sldChg chg="addSp delSp modSp new mod">
+        <pc:chgData name="kahraman kostas" userId="7e50b7f88a301451" providerId="LiveId" clId="{D29DB3F4-6A73-4688-B8FC-B3E2229DDA63}" dt="2026-10-21T09:11:27.588" v="66"/>
+        <pc:sldMkLst>
+          <pc:docMk/>
+          <pc:sldMk cId="1437870565" sldId="287"/>
+        </pc:sldMkLst>
+        <pc:spChg chg="del">
+          <ac:chgData name="kahraman kostas" userId="7e50b7f88a301451" providerId="LiveId" clId="{D29DB3F4-6A73-4688-B8FC-B3E2229DDA63}" dt="2026-10-21T09:07:35.375" v="64" actId="478"/>
+          <ac:spMkLst>
+            <pc:docMk/>
+            <pc:sldMk cId="1437870565" sldId="287"/>
+            <ac:spMk id="2" creationId="{210C2B5E-0944-22AE-9F70-8496EA61B92E}"/>
+          </ac:spMkLst>
+        </pc:spChg>
+        <pc:spChg chg="del">
+          <ac:chgData name="kahraman kostas" userId="7e50b7f88a301451" providerId="LiveId" clId="{D29DB3F4-6A73-4688-B8FC-B3E2229DDA63}" dt="2026-10-21T09:07:34.421" v="63" actId="478"/>
+          <ac:spMkLst>
+            <pc:docMk/>
+            <pc:sldMk cId="1437870565" sldId="287"/>
+            <ac:spMk id="3" creationId="{018ECFE0-B976-B7EC-1FF1-29C4342FBCF1}"/>
+          </ac:spMkLst>
+        </pc:spChg>
+        <pc:picChg chg="add mod">
+          <ac:chgData name="kahraman kostas" userId="7e50b7f88a301451" providerId="LiveId" clId="{D29DB3F4-6A73-4688-B8FC-B3E2229DDA63}" dt="2026-10-21T09:11:27.588" v="66"/>
+          <ac:picMkLst>
+            <pc:docMk/>
+            <pc:sldMk cId="1437870565" sldId="287"/>
+            <ac:picMk id="5" creationId="{9F0DD2E6-2F1C-D09D-92EF-380FE62B85F6}"/>
           </ac:picMkLst>
         </pc:picChg>
       </pc:sldChg>
@@ -3752,6 +3784,72 @@
           <p:cNvPr id="5" name="Picture 4">
             <a:extLst>
               <a:ext uri="{FF2B5EF4-FFF2-40B4-BE49-F238E27FC236}">
+                <a16:creationId xmlns:a16="http://schemas.microsoft.com/office/drawing/2014/main" id="{9F0DD2E6-2F1C-D09D-92EF-380FE62B85F6}"/>
+              </a:ext>
+            </a:extLst>
+          </p:cNvPr>
+          <p:cNvPicPr>
+            <a:picLocks noChangeAspect="1"/>
+          </p:cNvPicPr>
+          <p:nvPr/>
+        </p:nvPicPr>
+        <p:blipFill>
+          <a:blip r:embed="rId2">
+            <a:extLst>
+              <a:ext uri="{28A0092B-C50C-407E-A947-70E740481C1C}">
+                <a14:useLocalDpi xmlns:a14="http://schemas.microsoft.com/office/drawing/2010/main" val="0"/>
+              </a:ext>
+            </a:extLst>
+          </a:blip>
+          <a:stretch>
+            <a:fillRect/>
+          </a:stretch>
+        </p:blipFill>
+        <p:spPr>
+          <a:xfrm>
+            <a:off x="952500" y="0"/>
+            <a:ext cx="10287000" cy="6858000"/>
+          </a:xfrm>
+          <a:prstGeom prst="rect">
+            <a:avLst/>
+          </a:prstGeom>
+        </p:spPr>
+      </p:pic>
+    </p:spTree>
+    <p:extLst>
+      <p:ext uri="{BB962C8B-B14F-4D97-AF65-F5344CB8AC3E}">
+        <p14:creationId xmlns:p14="http://schemas.microsoft.com/office/powerpoint/2010/main" val="1437870565"/>
+      </p:ext>
+    </p:extLst>
+  </p:cSld>
+  <p:clrMapOvr>
+    <a:masterClrMapping/>
+  </p:clrMapOvr>
+</p:sld>
+</file>
+
+<file path=ppt/slides/slide3.xml><?xml version="1.0" encoding="utf-8"?>
+<p:sld xmlns:a="http://schemas.openxmlformats.org/drawingml/2006/main" xmlns:r="http://schemas.openxmlformats.org/officeDocument/2006/relationships" xmlns:p="http://schemas.openxmlformats.org/presentationml/2006/main">
+  <p:cSld>
+    <p:spTree>
+      <p:nvGrpSpPr>
+        <p:cNvPr id="1" name=""/>
+        <p:cNvGrpSpPr/>
+        <p:nvPr/>
+      </p:nvGrpSpPr>
+      <p:grpSpPr>
+        <a:xfrm>
+          <a:off x="0" y="0"/>
+          <a:ext cx="0" cy="0"/>
+          <a:chOff x="0" y="0"/>
+          <a:chExt cx="0" cy="0"/>
+        </a:xfrm>
+      </p:grpSpPr>
+      <p:pic>
+        <p:nvPicPr>
+          <p:cNvPr id="5" name="Picture 4">
+            <a:extLst>
+              <a:ext uri="{FF2B5EF4-FFF2-40B4-BE49-F238E27FC236}">
                 <a16:creationId xmlns:a16="http://schemas.microsoft.com/office/drawing/2014/main" id="{951AD4F0-9BFD-3451-B120-EBE0C88741BA}"/>
               </a:ext>
             </a:extLst>
@@ -3868,7 +3966,7 @@
 </p:sld>
 </file>
 
-<file path=ppt/slides/slide3.xml><?xml version="1.0" encoding="utf-8"?>
+<file path=ppt/slides/slide4.xml><?xml version="1.0" encoding="utf-8"?>
 <p:sld xmlns:a="http://schemas.openxmlformats.org/drawingml/2006/main" xmlns:r="http://schemas.openxmlformats.org/officeDocument/2006/relationships" xmlns:p="http://schemas.openxmlformats.org/presentationml/2006/main">
   <p:cSld>
     <p:spTree>
@@ -3934,7 +4032,7 @@
 </p:sld>
 </file>
 
-<file path=ppt/slides/slide4.xml><?xml version="1.0" encoding="utf-8"?>
+<file path=ppt/slides/slide5.xml><?xml version="1.0" encoding="utf-8"?>
 <p:sld xmlns:a="http://schemas.openxmlformats.org/drawingml/2006/main" xmlns:r="http://schemas.openxmlformats.org/officeDocument/2006/relationships" xmlns:p="http://schemas.openxmlformats.org/presentationml/2006/main">
   <p:cSld>
     <p:spTree>
@@ -4001,7 +4099,7 @@
 </p:sld>
 </file>
 
-<file path=ppt/slides/slide5.xml><?xml version="1.0" encoding="utf-8"?>
+<file path=ppt/slides/slide6.xml><?xml version="1.0" encoding="utf-8"?>
 <p:sld xmlns:a="http://schemas.openxmlformats.org/drawingml/2006/main" xmlns:r="http://schemas.openxmlformats.org/officeDocument/2006/relationships" xmlns:p="http://schemas.openxmlformats.org/presentationml/2006/main">
   <p:cSld>
     <p:bg>
@@ -14903,7 +15001,7 @@
 </p:sld>
 </file>
 
-<file path=ppt/slides/slide6.xml><?xml version="1.0" encoding="utf-8"?>
+<file path=ppt/slides/slide7.xml><?xml version="1.0" encoding="utf-8"?>
 <p:sld xmlns:a="http://schemas.openxmlformats.org/drawingml/2006/main" xmlns:r="http://schemas.openxmlformats.org/officeDocument/2006/relationships" xmlns:p="http://schemas.openxmlformats.org/presentationml/2006/main">
   <p:cSld>
     <p:bg>
